--- a/Data/presentations/Sales_Pitch_Deck.pptx
+++ b/Data/presentations/Sales_Pitch_Deck.pptx
@@ -23090,7 +23090,7 @@
                         <a:defRPr sz="1200"/>
                       </a:pPr>
                       <a:r>
-                        <a:t>Workstation Pro Variant 1</a:t>
+                        <a:t>Workstation Pro Professional Variant 1</a:t>
                       </a:r>
                     </a:p>
                   </a:txBody>
@@ -23197,7 +23197,7 @@
                         <a:defRPr sz="1200"/>
                       </a:pPr>
                       <a:r>
-                        <a:t>Workstation Pro Variant 2</a:t>
+                        <a:t>Workstation Pro Professional Variant 2</a:t>
                       </a:r>
                     </a:p>
                   </a:txBody>
@@ -23304,7 +23304,7 @@
                         <a:defRPr sz="1200"/>
                       </a:pPr>
                       <a:r>
-                        <a:t>Workstation Pro Variant 3</a:t>
+                        <a:t>Workstation Pro Professional Variant 3</a:t>
                       </a:r>
                     </a:p>
                   </a:txBody>
@@ -23560,7 +23560,7 @@
               </a:defRPr>
             </a:pPr>
             <a:r>
-              <a:t>• Your company requires a high-performance workstation to handle demanding professional tasks.</a:t>
+              <a:t>• Your company requires a high-performance workstation to handle demanding professional workloads.</a:t>
             </a:r>
           </a:p>
           <a:p>
@@ -23576,7 +23576,7 @@
               </a:defRPr>
             </a:pPr>
             <a:r>
-              <a:t>• Need for reliable and fast processing power to increase productivity.</a:t>
+              <a:t>• Need for reliable and fast processing power to boost productivity.</a:t>
             </a:r>
           </a:p>
           <a:p>
@@ -23592,7 +23592,7 @@
               </a:defRPr>
             </a:pPr>
             <a:r>
-              <a:t>• Requirement for ample memory and storage to support large datasets and applications.</a:t>
+              <a:t>• Essential to have ample memory and storage for large data and applications.</a:t>
             </a:r>
           </a:p>
           <a:p>
@@ -23608,7 +23608,7 @@
               </a:defRPr>
             </a:pPr>
             <a:r>
-              <a:t>• Desire for a solution with dependable warranty and support options.</a:t>
+              <a:t>• Looking for a solution with dependable warranty and optional support services.</a:t>
             </a:r>
           </a:p>
           <a:p>
@@ -23624,7 +23624,7 @@
               </a:defRPr>
             </a:pPr>
             <a:r>
-              <a:t>• Timely delivery is essential to meet project deadlines.</a:t>
+              <a:t>• Timely delivery is crucial to meet project deadlines.</a:t>
             </a:r>
           </a:p>
         </p:txBody>
@@ -23784,7 +23784,7 @@
               </a:defRPr>
             </a:pPr>
             <a:r>
-              <a:t>• Introducing the Workstation Pro Professional tailored to your needs.</a:t>
+              <a:t>• Introducing the Workstation Pro Professional tailored to meet your needs.</a:t>
             </a:r>
           </a:p>
           <a:p>
@@ -23800,7 +23800,7 @@
               </a:defRPr>
             </a:pPr>
             <a:r>
-              <a:t>• Equipped with cutting-edge Intel Xeon W-2295 CPU for superior processing.</a:t>
+              <a:t>• Equipped with powerful Intel Xeon W-2295 CPU for superior performance.</a:t>
             </a:r>
           </a:p>
           <a:p>
@@ -23816,7 +23816,7 @@
               </a:defRPr>
             </a:pPr>
             <a:r>
-              <a:t>• Generous 32GB DDR4 RAM ensures smooth multitasking and performance.</a:t>
+              <a:t>• 32GB DDR4 RAM ensures smooth multitasking and efficient workflows.</a:t>
             </a:r>
           </a:p>
           <a:p>
@@ -23832,7 +23832,7 @@
               </a:defRPr>
             </a:pPr>
             <a:r>
-              <a:t>• Fast 1TB NVMe SSD storage for quick access to files and applications.</a:t>
+              <a:t>• 1TB NVMe SSD provides fast storage and quick data access.</a:t>
             </a:r>
           </a:p>
           <a:p>
@@ -23848,7 +23848,7 @@
               </a:defRPr>
             </a:pPr>
             <a:r>
-              <a:t>• Flexible support options including setup and integration services.</a:t>
+              <a:t>• Flexible warranty and optional setup support to ensure peace of mind.</a:t>
             </a:r>
           </a:p>
         </p:txBody>
@@ -24008,7 +24008,7 @@
               </a:defRPr>
             </a:pPr>
             <a:r>
-              <a:t>• CPU: Intel Xeon W-2295 – engineered for professional workloads.</a:t>
+              <a:t>• CPU: Intel Xeon W-2295 delivering exceptional processing speed.</a:t>
             </a:r>
           </a:p>
           <a:p>
@@ -24024,7 +24024,7 @@
               </a:defRPr>
             </a:pPr>
             <a:r>
-              <a:t>• RAM: 32GB DDR4 – optimized for heavy multitasking and data processing.</a:t>
+              <a:t>• RAM: 32GB DDR4 for seamless multitasking and application handling.</a:t>
             </a:r>
           </a:p>
           <a:p>
@@ -24040,7 +24040,7 @@
               </a:defRPr>
             </a:pPr>
             <a:r>
-              <a:t>• Storage: 1TB NVMe SSD – ultra-fast read/write speeds for efficient workflows.</a:t>
+              <a:t>• Storage: 1TB NVMe SSD for rapid data transfer and ample capacity.</a:t>
             </a:r>
           </a:p>
           <a:p>
@@ -24056,7 +24056,7 @@
               </a:defRPr>
             </a:pPr>
             <a:r>
-              <a:t>• Quantity: 1 unit – customized to your project scope.</a:t>
+              <a:t>• Quantity: 1 unit designed for professional-grade performance.</a:t>
             </a:r>
           </a:p>
           <a:p>
@@ -24072,7 +24072,7 @@
               </a:defRPr>
             </a:pPr>
             <a:r>
-              <a:t>• Warranty: 1-year included to safeguard your investment.</a:t>
+              <a:t>• Warranty: 1-year included for comprehensive coverage.</a:t>
             </a:r>
           </a:p>
         </p:txBody>
@@ -24232,7 +24232,7 @@
               </a:defRPr>
             </a:pPr>
             <a:r>
-              <a:t>• Unit Price: $3,499.99 – competitive pricing for premium performance.</a:t>
+              <a:t>• Unit Price: $3,499.99 offering excellent value for top-tier hardware.</a:t>
             </a:r>
           </a:p>
           <a:p>
@@ -24248,7 +24248,7 @@
               </a:defRPr>
             </a:pPr>
             <a:r>
-              <a:t>• Includes 1-year standard warranty at no extra cost.</a:t>
+              <a:t>• Transparent pricing with no hidden fees.</a:t>
             </a:r>
           </a:p>
           <a:p>
@@ -24264,7 +24264,7 @@
               </a:defRPr>
             </a:pPr>
             <a:r>
-              <a:t>• Optional setup and integration support available to simplify deployment.</a:t>
+              <a:t>• Optional setup and integration support available to optimize deployment.</a:t>
             </a:r>
           </a:p>
           <a:p>
@@ -24280,7 +24280,7 @@
               </a:defRPr>
             </a:pPr>
             <a:r>
-              <a:t>• Transparent pricing ensures no hidden fees or surprises.</a:t>
+              <a:t>• Investment in quality hardware reduces downtime and increases efficiency.</a:t>
             </a:r>
           </a:p>
           <a:p>
@@ -24296,7 +24296,7 @@
               </a:defRPr>
             </a:pPr>
             <a:r>
-              <a:t>• Investment aligned with your company's productivity goals.</a:t>
+              <a:t>• Competitive pricing aligned with industry standards for professional workstations.</a:t>
             </a:r>
           </a:p>
         </p:txBody>
@@ -24456,7 +24456,7 @@
               </a:defRPr>
             </a:pPr>
             <a:r>
-              <a:t>• 1-year warranty included to cover hardware defects and malfunctions.</a:t>
+              <a:t>• 1-year standard warranty included for reliable protection.</a:t>
             </a:r>
           </a:p>
           <a:p>
@@ -24472,7 +24472,7 @@
               </a:defRPr>
             </a:pPr>
             <a:r>
-              <a:t>• Optional setup and integration support to ensure smooth installation.</a:t>
+              <a:t>• Optional setup and integration services to ensure smooth installation.</a:t>
             </a:r>
           </a:p>
           <a:p>
@@ -24488,7 +24488,7 @@
               </a:defRPr>
             </a:pPr>
             <a:r>
-              <a:t>• Dedicated customer service to assist with any technical issues.</a:t>
+              <a:t>• Support options designed to minimize operational disruptions.</a:t>
             </a:r>
           </a:p>
           <a:p>
@@ -24504,7 +24504,7 @@
               </a:defRPr>
             </a:pPr>
             <a:r>
-              <a:t>• Peace of mind with reliable post-purchase support.</a:t>
+              <a:t>• Access to expert technical assistance if needed.</a:t>
             </a:r>
           </a:p>
           <a:p>
@@ -24520,7 +24520,7 @@
               </a:defRPr>
             </a:pPr>
             <a:r>
-              <a:t>• Enhance system uptime and reduce operational risks.</a:t>
+              <a:t>• Peace of mind with comprehensive after-sales support.</a:t>
             </a:r>
           </a:p>
         </p:txBody>
@@ -24680,7 +24680,7 @@
               </a:defRPr>
             </a:pPr>
             <a:r>
-              <a:t>• Compare three variants of our Workstation Pro series to find your perfect fit.</a:t>
+              <a:t>• Compare three variants of our Workstation Pro Professional to suit your preferences.</a:t>
             </a:r>
           </a:p>
           <a:p>
@@ -24696,7 +24696,7 @@
               </a:defRPr>
             </a:pPr>
             <a:r>
-              <a:t>• All variants feature identical high-end specifications for consistent performance.</a:t>
+              <a:t>• All variants feature the same high-end specifications for consistent performance.</a:t>
             </a:r>
           </a:p>
           <a:p>
@@ -24712,7 +24712,7 @@
               </a:defRPr>
             </a:pPr>
             <a:r>
-              <a:t>• Variants differ in name to suit different branding or departmental needs.</a:t>
+              <a:t>• Choose the product name that best fits your procurement or project naming conventions.</a:t>
             </a:r>
           </a:p>
           <a:p>
@@ -24728,7 +24728,7 @@
               </a:defRPr>
             </a:pPr>
             <a:r>
-              <a:t>• Transparent comparison ensures informed decision-making.</a:t>
+              <a:t>• All options maintain the same price point and warranty coverage.</a:t>
             </a:r>
           </a:p>
           <a:p>
@@ -24744,7 +24744,7 @@
               </a:defRPr>
             </a:pPr>
             <a:r>
-              <a:t>• Choose the variant that best aligns with your organizational structure.</a:t>
+              <a:t>• Support options remain flexible across all variants.</a:t>
             </a:r>
           </a:p>
         </p:txBody>
@@ -24904,7 +24904,7 @@
               </a:defRPr>
             </a:pPr>
             <a:r>
-              <a:t>• Estimated delivery within 2-3 weeks from order confirmation.</a:t>
+              <a:t>• Estimated delivery within 2-3 weeks after order confirmation.</a:t>
             </a:r>
           </a:p>
           <a:p>
@@ -24920,7 +24920,7 @@
               </a:defRPr>
             </a:pPr>
             <a:r>
-              <a:t>• Efficient processing to meet your project deadlines.</a:t>
+              <a:t>• Efficient logistics ensure timely arrival to meet your project schedules.</a:t>
             </a:r>
           </a:p>
           <a:p>
@@ -24952,7 +24952,7 @@
               </a:defRPr>
             </a:pPr>
             <a:r>
-              <a:t>• Timely delivery ensures minimal downtime and quick deployment.</a:t>
+              <a:t>• Optional expedited shipping can be discussed if urgent.</a:t>
             </a:r>
           </a:p>
           <a:p>
@@ -24968,7 +24968,7 @@
               </a:defRPr>
             </a:pPr>
             <a:r>
-              <a:t>• Flexible scheduling available upon request.</a:t>
+              <a:t>• Our commitment to prompt delivery supports your business continuity.</a:t>
             </a:r>
           </a:p>
         </p:txBody>
@@ -25128,7 +25128,7 @@
               </a:defRPr>
             </a:pPr>
             <a:r>
-              <a:t>• Secure your Workstation Pro Professional today to boost productivity.</a:t>
+              <a:t>• Secure your Workstation Pro Professional today to enhance your operational capabilities.</a:t>
             </a:r>
           </a:p>
           <a:p>
@@ -25144,7 +25144,7 @@
               </a:defRPr>
             </a:pPr>
             <a:r>
-              <a:t>• Contact us to discuss optional support and integration services.</a:t>
+              <a:t>• Contact us to finalize your order and discuss optional setup support.</a:t>
             </a:r>
           </a:p>
           <a:p>
@@ -25160,7 +25160,7 @@
               </a:defRPr>
             </a:pPr>
             <a:r>
-              <a:t>• Take advantage of our competitive pricing and reliable warranty.</a:t>
+              <a:t>• Leverage our expertise to ensure seamless integration into your workflow.</a:t>
             </a:r>
           </a:p>
           <a:p>
@@ -25176,7 +25176,7 @@
               </a:defRPr>
             </a:pPr>
             <a:r>
-              <a:t>• Ensure timely delivery by placing your order now.</a:t>
+              <a:t>• Act now to benefit from our reliable delivery and comprehensive warranty.</a:t>
             </a:r>
           </a:p>
           <a:p>
@@ -25192,7 +25192,7 @@
               </a:defRPr>
             </a:pPr>
             <a:r>
-              <a:t>• Partner with us for a seamless technology upgrade experience.</a:t>
+              <a:t>• We look forward to partnering with your company for success.</a:t>
             </a:r>
           </a:p>
         </p:txBody>
